--- a/Activation Experience Phase 1.pptx
+++ b/Activation Experience Phase 1.pptx
@@ -109,6 +109,11 @@
       </a:defRPr>
     </a:lvl9pPr>
   </p:defaultTextStyle>
+  <p:extLst>
+    <p:ext uri="{EFAFB233-063F-42B5-8137-9DF3F51BA10A}">
+      <p15:sldGuideLst xmlns:p15="http://schemas.microsoft.com/office/powerpoint/2012/main"/>
+    </p:ext>
+  </p:extLst>
 </p:presentation>
 </file>
 
@@ -117,6 +122,43 @@
   <p188:author id="{6E71D90F-B75A-A1C0-7EFD-D35F0D55EC1C}" name="Jun Qu" initials="JQ" userId="S::juq@microsoft.com::edb5e75b-d541-4937-86a7-c4759fcc4164" providerId="AD"/>
   <p188:author id="{09623DB4-A76E-2B73-47BB-B85CD8A7EC2C}" name="Ericka Calvert" initials="EC" userId="S::ercalver@microsoft.com::7b5e2157-e8a6-4976-b13f-336589a79df2" providerId="AD"/>
 </p188:authorLst>
+</file>
+
+<file path=ppt/changesInfos/changesInfo1.xml><?xml version="1.0" encoding="utf-8"?>
+<pc:chgInfo xmlns:a="http://schemas.openxmlformats.org/drawingml/2006/main" xmlns:r="http://schemas.openxmlformats.org/officeDocument/2006/relationships" xmlns:ac="http://schemas.microsoft.com/office/drawing/2013/main/command" xmlns:pc="http://schemas.microsoft.com/office/powerpoint/2013/main/command">
+  <pc:docChgLst>
+    <pc:chgData name="Ali Khaki" userId="7c5508d4-9ae1-4d98-a3c0-ed4ce87747fc" providerId="ADAL" clId="{5C7286AA-F4EB-4DE7-B282-249D270BF799}"/>
+    <pc:docChg chg="custSel addSld delSld modSld">
+      <pc:chgData name="Ali Khaki" userId="7c5508d4-9ae1-4d98-a3c0-ed4ce87747fc" providerId="ADAL" clId="{5C7286AA-F4EB-4DE7-B282-249D270BF799}" dt="2026-02-18T18:02:03.297" v="573" actId="47"/>
+      <pc:docMkLst>
+        <pc:docMk/>
+      </pc:docMkLst>
+      <pc:sldChg chg="modSp new del mod">
+        <pc:chgData name="Ali Khaki" userId="7c5508d4-9ae1-4d98-a3c0-ed4ce87747fc" providerId="ADAL" clId="{5C7286AA-F4EB-4DE7-B282-249D270BF799}" dt="2026-02-18T18:02:03.297" v="573" actId="47"/>
+        <pc:sldMkLst>
+          <pc:docMk/>
+          <pc:sldMk cId="1235671088" sldId="318"/>
+        </pc:sldMkLst>
+        <pc:spChg chg="mod">
+          <ac:chgData name="Ali Khaki" userId="7c5508d4-9ae1-4d98-a3c0-ed4ce87747fc" providerId="ADAL" clId="{5C7286AA-F4EB-4DE7-B282-249D270BF799}" dt="2026-02-18T17:57:17.064" v="41" actId="20577"/>
+          <ac:spMkLst>
+            <pc:docMk/>
+            <pc:sldMk cId="1235671088" sldId="318"/>
+            <ac:spMk id="2" creationId="{7F5FAF96-24FF-D4BC-D759-CDA9084EB0A6}"/>
+          </ac:spMkLst>
+        </pc:spChg>
+        <pc:spChg chg="mod">
+          <ac:chgData name="Ali Khaki" userId="7c5508d4-9ae1-4d98-a3c0-ed4ce87747fc" providerId="ADAL" clId="{5C7286AA-F4EB-4DE7-B282-249D270BF799}" dt="2026-02-18T18:01:37.419" v="572" actId="20577"/>
+          <ac:spMkLst>
+            <pc:docMk/>
+            <pc:sldMk cId="1235671088" sldId="318"/>
+            <ac:spMk id="3" creationId="{DCA5B138-38BE-6B13-5C23-D387CD2377E0}"/>
+          </ac:spMkLst>
+        </pc:spChg>
+      </pc:sldChg>
+    </pc:docChg>
+  </pc:docChgLst>
+</pc:chgInfo>
 </file>
 
 <file path=ppt/comments/modernComment_13D_7DAC2756.xml><?xml version="1.0" encoding="utf-8"?>
@@ -223,7 +265,7 @@
           <a:p>
             <a:fld id="{03D5A48A-7404-4F9C-B921-BB90FCD56ECB}" type="datetimeFigureOut">
               <a:rPr lang="en-US" smtClean="0"/>
-              <a:t>2/15/2026</a:t>
+              <a:t>2/18/2026</a:t>
             </a:fld>
             <a:endParaRPr lang="en-US"/>
           </a:p>
@@ -4102,7 +4144,7 @@
           <a:p>
             <a:fld id="{7D4F8A8F-FE74-4C26-B7AE-81B41785374B}" type="datetimeFigureOut">
               <a:rPr lang="en-IE" smtClean="0"/>
-              <a:t>13/02/2026</a:t>
+              <a:t>18/02/2026</a:t>
             </a:fld>
             <a:endParaRPr lang="en-IE"/>
           </a:p>
